--- a/docs/training/VulnHunterX-120min.pptx
+++ b/docs/training/VulnHunterX-120min.pptx
@@ -2105,7 +2105,7 @@
           <a:lstStyle/>
           <a:p>
             <a:r>
-              <a:t>SAST reads code like a pedantic reviewer — sees everything, can't prove reachability, over-reports. DAST throws real traffic at a live app — exploitable but only covers what it hit. Complementary. VulnHunterX is a SAST tool (its optional fuzzing stage adds DAST-like runtime confirmation for C/C++ — out of scope today).</a:t>
+              <a:t>SAST reads code like a pedantic reviewer — sees everything, can't prove reachability, over-reports. DAST throws real traffic at a live app — exploitable but only covers what it hit. Complementary. VulnHunterX combines SAST with evidence-based LLM verification.</a:t>
             </a:r>
           </a:p>
         </p:txBody>
@@ -18102,7 +18102,7 @@
                 </a:solidFill>
                 <a:latin typeface="Segoe UI"/>
               </a:rPr>
-              <a:t>VulnHunterX architecture &amp; stages (no fuzzing)</a:t>
+              <a:t>VulnHunterX architecture &amp; stages</a:t>
             </a:r>
           </a:p>
           <a:p>
@@ -30740,7 +30740,7 @@
                 </a:solidFill>
                 <a:latin typeface="Segoe UI"/>
               </a:rPr>
-              <a:t>VulnHunterX (no fuzzing): architecture &amp; stages</a:t>
+              <a:t>VulnHunterX architecture &amp; stages</a:t>
             </a:r>
           </a:p>
         </p:txBody>
@@ -32600,7 +32600,7 @@
                 </a:solidFill>
                 <a:latin typeface="Segoe UI"/>
               </a:rPr>
-              <a:t>Stages 5–8 add ASan build + fuzzing for C/C++ — out of scope today.</a:t>
+              <a:t>scan runs all four supported stages in one command.</a:t>
             </a:r>
           </a:p>
         </p:txBody>
@@ -37708,7 +37708,7 @@
                 </a:solidFill>
                 <a:latin typeface="Segoe UI"/>
               </a:rPr>
-              <a:t>Per-language YAML banks: config/prompts/&lt;lang&gt;_questions.yaml (366 entries).</a:t>
+              <a:t>Per-language YAML banks: config/prompts/&lt;lang&gt;_questions.yaml (365 entries).</a:t>
             </a:r>
           </a:p>
           <a:p>
@@ -48641,7 +48641,7 @@
                 </a:solidFill>
                 <a:latin typeface="Segoe UI"/>
               </a:rPr>
-              <a:t>65 CodeQL queries + 108 Semgrep rules, plus 366 guided-question entries (live count).</a:t>
+              <a:t>65 CodeQL queries + 108 Semgrep rules, plus 365 guided-question entries (live count).</a:t>
             </a:r>
           </a:p>
         </p:txBody>
